--- a/docs/pitch/JanVaani_pitch.pptx
+++ b/docs/pitch/JanVaani_pitch.pptx
@@ -10141,7 +10141,7 @@
                 </a:solidFill>
                 <a:latin typeface="Calibri"/>
               </a:rPr>
-              <a:t>Live eval (gemini-2.5-flash, extract_v1): 100% category accuracy on 34 EN/HI/TE requests · 0 invented numbers · 0 invented places.  Template-labelled sample, a sanity check, not a field result.</a:t>
+              <a:t>Live eval (gemini-2.5-flash, extract_v1): 100% category accuracy on 39 EN/HI/TE requests · 0 invented numbers · 0 invented places.  Template-labelled sample, a sanity check, not a field result.</a:t>
             </a:r>
           </a:p>
         </p:txBody>
